--- a/media/resources/files/4-amal-kondumA_25gGXYh.pptx
+++ b/media/resources/files/4-amal-kondumA_25gGXYh.pptx
@@ -937,7 +937,7 @@
                 <a:latin typeface="Arial" panose="020B0604020202020204" pitchFamily="34" charset="0"/>
                 <a:cs typeface="Arial" panose="020B0604020202020204" pitchFamily="34" charset="0"/>
               </a:rPr>
-              <a:t>Кондум баракчасы А</a:t>
+              <a:t>Көндүм баракчасы А</a:t>
             </a:r>
             <a:endParaRPr lang="en-GB" sz="2000" u="sng" dirty="0">
               <a:solidFill>
@@ -3447,7 +3447,7 @@
                 <a:latin typeface="Arial" panose="020B0604020202020204" pitchFamily="34" charset="0"/>
                 <a:cs typeface="Arial" panose="020B0604020202020204" pitchFamily="34" charset="0"/>
               </a:rPr>
-              <a:t>Ар кандай пикир ыраазычылык билдиребиз.</a:t>
+              <a:t>Ар кандай пикир үчүн ыраазычылык билдиребиз.</a:t>
             </a:r>
           </a:p>
           <a:p>
